--- a/presentations/DESKHUB_MASTER_PRESENTATION_v1.2.1.pptx
+++ b/presentations/DESKHUB_MASTER_PRESENTATION_v1.2.1.pptx
@@ -13744,8 +13744,8 @@
         </p:nvSpPr>
         <p:spPr>
           <a:xfrm>
-            <a:off x="548640" y="4617720"/>
-            <a:ext cx="8046720" cy="365760"/>
+            <a:off x="548640" y="4572000"/>
+            <a:ext cx="8046720" cy="274320"/>
           </a:xfrm>
           <a:prstGeom prst="rect">
             <a:avLst/>
@@ -13769,7 +13769,7 @@
                 <a:ea typeface="Calibri" pitchFamily="34" charset="-122"/>
                 <a:cs typeface="Calibri" pitchFamily="34" charset="-120"/>
               </a:rPr>
-              <a:t>DeskSolution construye lo que el cliente necesita hoy. Services acompaña la implementación, integración y operación.</a:t>
+              <a:t>DeskSolution construye lo que el cliente necesita hoy.</a:t>
             </a:r>
             <a:endParaRPr lang="en-US" sz="1100" dirty="0"/>
           </a:p>
@@ -13778,6 +13778,45 @@
       <p:sp>
         <p:nvSpPr>
           <p:cNvPr id="35" name="Text 33"/>
+          <p:cNvSpPr/>
+          <p:nvPr/>
+        </p:nvSpPr>
+        <p:spPr>
+          <a:xfrm>
+            <a:off x="548640" y="4846320"/>
+            <a:ext cx="8046720" cy="274320"/>
+          </a:xfrm>
+          <a:prstGeom prst="rect">
+            <a:avLst/>
+          </a:prstGeom>
+          <a:noFill/>
+          <a:ln/>
+        </p:spPr>
+        <p:txBody>
+          <a:bodyPr wrap="square" lIns="0" tIns="0" rIns="0" bIns="0" rtlCol="0" anchor="ctr"/>
+          <a:lstStyle/>
+          <a:p>
+            <a:pPr algn="ctr" indent="0" marL="0">
+              <a:buNone/>
+            </a:pPr>
+            <a:r>
+              <a:rPr lang="en-US" sz="1100" i="1" dirty="0">
+                <a:solidFill>
+                  <a:srgbClr val="7C7A72"/>
+                </a:solidFill>
+                <a:latin typeface="Calibri" pitchFamily="34" charset="0"/>
+                <a:ea typeface="Calibri" pitchFamily="34" charset="-122"/>
+                <a:cs typeface="Calibri" pitchFamily="34" charset="-120"/>
+              </a:rPr>
+              <a:t>Services acompaña la implementación, integración y operación.</a:t>
+            </a:r>
+            <a:endParaRPr lang="en-US" sz="1100" dirty="0"/>
+          </a:p>
+        </p:txBody>
+      </p:sp>
+      <p:sp>
+        <p:nvSpPr>
+          <p:cNvPr id="36" name="Text 34"/>
           <p:cNvSpPr/>
           <p:nvPr/>
         </p:nvSpPr>
@@ -16129,7 +16168,7 @@
         <p:spPr>
           <a:xfrm>
             <a:off x="548640" y="1828800"/>
-            <a:ext cx="8046720" cy="1645920"/>
+            <a:ext cx="8046720" cy="1097280"/>
           </a:xfrm>
           <a:prstGeom prst="rect">
             <a:avLst/>
@@ -16145,7 +16184,7 @@
               <a:buNone/>
             </a:pPr>
             <a:r>
-              <a:rPr lang="en-US" sz="2400" b="1" dirty="0">
+              <a:rPr lang="en-US" sz="2200" b="1" dirty="0">
                 <a:solidFill>
                   <a:srgbClr val="14171E"/>
                 </a:solidFill>
@@ -16153,15 +16192,54 @@
                 <a:ea typeface="Calibri" pitchFamily="34" charset="-122"/>
                 <a:cs typeface="Calibri" pitchFamily="34" charset="-120"/>
               </a:rPr>
-              <a:t>Construir un ecosistema que permita a organizaciones empresariales e institucionales integrar, operar, comprender y evolucionar su trabajo sin tener que reconstruir desde cero su arquitectura tecnológica.</a:t>
-            </a:r>
-            <a:endParaRPr lang="en-US" sz="2400" dirty="0"/>
-          </a:p>
-        </p:txBody>
-      </p:sp>
-      <p:sp>
-        <p:nvSpPr>
-          <p:cNvPr id="7" name="Shape 5"/>
+              <a:t>Construir un ecosistema que permita a organizaciones empresariales e institucionales integrar, operar, comprender y evolucionar su trabajo —</a:t>
+            </a:r>
+            <a:endParaRPr lang="en-US" sz="2200" dirty="0"/>
+          </a:p>
+        </p:txBody>
+      </p:sp>
+      <p:sp>
+        <p:nvSpPr>
+          <p:cNvPr id="7" name="Text 5"/>
+          <p:cNvSpPr/>
+          <p:nvPr/>
+        </p:nvSpPr>
+        <p:spPr>
+          <a:xfrm>
+            <a:off x="548640" y="2926080"/>
+            <a:ext cx="8046720" cy="640080"/>
+          </a:xfrm>
+          <a:prstGeom prst="rect">
+            <a:avLst/>
+          </a:prstGeom>
+          <a:noFill/>
+          <a:ln/>
+        </p:spPr>
+        <p:txBody>
+          <a:bodyPr wrap="square" lIns="0" tIns="0" rIns="0" bIns="0" rtlCol="0" anchor="ctr"/>
+          <a:lstStyle/>
+          <a:p>
+            <a:pPr indent="0" marL="0">
+              <a:buNone/>
+            </a:pPr>
+            <a:r>
+              <a:rPr lang="en-US" sz="2200" b="1" dirty="0">
+                <a:solidFill>
+                  <a:srgbClr val="0D4F4A"/>
+                </a:solidFill>
+                <a:latin typeface="Calibri" pitchFamily="34" charset="0"/>
+                <a:ea typeface="Calibri" pitchFamily="34" charset="-122"/>
+                <a:cs typeface="Calibri" pitchFamily="34" charset="-120"/>
+              </a:rPr>
+              <a:t>sin tener que reconstruir desde cero su arquitectura tecnológica.</a:t>
+            </a:r>
+            <a:endParaRPr lang="en-US" sz="2200" dirty="0"/>
+          </a:p>
+        </p:txBody>
+      </p:sp>
+      <p:sp>
+        <p:nvSpPr>
+          <p:cNvPr id="8" name="Shape 6"/>
           <p:cNvSpPr/>
           <p:nvPr/>
         </p:nvSpPr>
@@ -16184,7 +16262,7 @@
       </p:sp>
       <p:sp>
         <p:nvSpPr>
-          <p:cNvPr id="8" name="Text 6"/>
+          <p:cNvPr id="9" name="Text 7"/>
           <p:cNvSpPr/>
           <p:nvPr/>
         </p:nvSpPr>
@@ -16223,7 +16301,7 @@
       </p:sp>
       <p:sp>
         <p:nvSpPr>
-          <p:cNvPr id="9" name="Text 7"/>
+          <p:cNvPr id="10" name="Text 8"/>
           <p:cNvSpPr/>
           <p:nvPr/>
         </p:nvSpPr>
@@ -16262,7 +16340,7 @@
       </p:sp>
       <p:sp>
         <p:nvSpPr>
-          <p:cNvPr id="10" name="Text 8"/>
+          <p:cNvPr id="11" name="Text 9"/>
           <p:cNvSpPr/>
           <p:nvPr/>
         </p:nvSpPr>
@@ -22194,7 +22272,46 @@
         </p:nvSpPr>
         <p:spPr>
           <a:xfrm>
-            <a:off x="548640" y="4297680"/>
+            <a:off x="548640" y="4160520"/>
+            <a:ext cx="8046720" cy="274320"/>
+          </a:xfrm>
+          <a:prstGeom prst="rect">
+            <a:avLst/>
+          </a:prstGeom>
+          <a:noFill/>
+          <a:ln/>
+        </p:spPr>
+        <p:txBody>
+          <a:bodyPr wrap="square" lIns="0" tIns="0" rIns="0" bIns="0" rtlCol="0" anchor="ctr"/>
+          <a:lstStyle/>
+          <a:p>
+            <a:pPr algn="ctr" indent="0" marL="0">
+              <a:buNone/>
+            </a:pPr>
+            <a:r>
+              <a:rPr lang="en-US" sz="1000" b="1" i="1" spc="200" kern="0" dirty="0">
+                <a:solidFill>
+                  <a:srgbClr val="7C7A72"/>
+                </a:solidFill>
+                <a:latin typeface="Calibri" pitchFamily="34" charset="0"/>
+                <a:ea typeface="Calibri" pitchFamily="34" charset="-122"/>
+                <a:cs typeface="Calibri" pitchFamily="34" charset="-120"/>
+              </a:rPr>
+              <a:t>Principio mnemónico:</a:t>
+            </a:r>
+            <a:endParaRPr lang="en-US" sz="1000" dirty="0"/>
+          </a:p>
+        </p:txBody>
+      </p:sp>
+      <p:sp>
+        <p:nvSpPr>
+          <p:cNvPr id="24" name="Text 22"/>
+          <p:cNvSpPr/>
+          <p:nvPr/>
+        </p:nvSpPr>
+        <p:spPr>
+          <a:xfrm>
+            <a:off x="548640" y="4434840"/>
             <a:ext cx="8046720" cy="365760"/>
           </a:xfrm>
           <a:prstGeom prst="rect">
@@ -22211,7 +22328,7 @@
               <a:buNone/>
             </a:pPr>
             <a:r>
-              <a:rPr lang="en-US" sz="1100" i="1" dirty="0">
+              <a:rPr lang="en-US" sz="1200" i="1" dirty="0">
                 <a:solidFill>
                   <a:srgbClr val="3A4256"/>
                 </a:solidFill>
@@ -22219,15 +22336,15 @@
                 <a:ea typeface="Calibri" pitchFamily="34" charset="-122"/>
                 <a:cs typeface="Calibri" pitchFamily="34" charset="-120"/>
               </a:rPr>
-              <a:t>Principio mnemónico: "DeskCore sostiene. Desk Integration conecta. DeskFlow coordina y ejecuta. DeskWork presenta."</a:t>
-            </a:r>
-            <a:endParaRPr lang="en-US" sz="1100" dirty="0"/>
-          </a:p>
-        </p:txBody>
-      </p:sp>
-      <p:sp>
-        <p:nvSpPr>
-          <p:cNvPr id="24" name="Text 22"/>
+              <a:t>“DeskCore sostiene. Desk Integration conecta. DeskFlow coordina y ejecuta. DeskWork presenta.”</a:t>
+            </a:r>
+            <a:endParaRPr lang="en-US" sz="1200" dirty="0"/>
+          </a:p>
+        </p:txBody>
+      </p:sp>
+      <p:sp>
+        <p:nvSpPr>
+          <p:cNvPr id="25" name="Text 23"/>
           <p:cNvSpPr/>
           <p:nvPr/>
         </p:nvSpPr>
